--- a/需求/驾驶舱/迭代需求0720(1)(1).pptx
+++ b/需求/驾驶舱/迭代需求0720(1)(1).pptx
@@ -4443,7 +4443,7 @@
         <p:spPr>
           <a:xfrm>
             <a:off x="6869430" y="894080"/>
-            <a:ext cx="4858385" cy="3023870"/>
+            <a:ext cx="4858385" cy="3076575"/>
           </a:xfrm>
           <a:prstGeom prst="rect">
             <a:avLst/>

--- a/需求/驾驶舱/迭代需求0720(1)(1).pptx
+++ b/需求/驾驶舱/迭代需求0720(1)(1).pptx
@@ -4954,7 +4954,27 @@
                 <a:ea typeface="微软雅黑" panose="020B0503020204020204" charset="-122"/>
                 <a:cs typeface="+mn-cs"/>
               </a:rPr>
-              <a:t>新增关键岗位人数：取值逻辑，派出总经理、财务负责人数量，参股信息管理需增加字段（是否为财务负责人）下钻：具体人员</a:t>
+              <a:t>新增关键岗位人数：取值逻辑，派出总经理、财务负责人数量，参股信息管理需增加字段（是否为财务负责人）</a:t>
+            </a:r>
+            <a:r>
+              <a:rPr kumimoji="0" lang="zh-CN" altLang="en-US" sz="1050" b="1" i="0" u="none" strike="noStrike" kern="1200" cap="none" spc="0" normalizeH="0" baseline="0" noProof="0" dirty="0">
+                <a:ln>
+                  <a:noFill/>
+                </a:ln>
+                <a:solidFill>
+                  <a:srgbClr val="FF0000"/>
+                </a:solidFill>
+                <a:effectLst/>
+                <a:highlight>
+                  <a:srgbClr val="FFFF00"/>
+                </a:highlight>
+                <a:uLnTx/>
+                <a:uFillTx/>
+                <a:latin typeface="微软雅黑" panose="020B0503020204020204" charset="-122"/>
+                <a:ea typeface="微软雅黑" panose="020B0503020204020204" charset="-122"/>
+                <a:cs typeface="+mn-cs"/>
+              </a:rPr>
+              <a:t>下钻：具体人员</a:t>
             </a:r>
             <a:endParaRPr kumimoji="0" lang="en-US" altLang="zh-CN" sz="1050" b="1" i="0" u="none" strike="noStrike" kern="1200" cap="none" spc="0" normalizeH="0" baseline="0" noProof="0" dirty="0">
               <a:ln>
